--- a/PPTs/Lecture 0-course overview.pptx
+++ b/PPTs/Lecture 0-course overview.pptx
@@ -3894,7 +3894,7 @@
                   <a:schemeClr val="accent1"/>
                 </a:solidFill>
               </a:rPr>
-              <a:t>112/256 Course Overview</a:t>
+              <a:t>112 Course Overview</a:t>
             </a:r>
             <a:endParaRPr lang="en-US" dirty="0">
               <a:solidFill>
@@ -4194,7 +4194,7 @@
             </a:r>
             <a:r>
               <a:rPr lang="en-US" altLang="zh-CN" dirty="0"/>
-              <a:t>MW 8:00-9:40 am, SIC 219</a:t>
+              <a:t>MW 8:00–9:40 AM, SIC 219</a:t>
             </a:r>
           </a:p>
           <a:p>
@@ -4347,11 +4347,11 @@
             <a:pPr lvl="1"/>
             <a:r>
               <a:rPr lang="en-GB" dirty="0"/>
-              <a:t>Available on discord and on</a:t>
+              <a:t>Available on Discord and on</a:t>
             </a:r>
             <a:r>
               <a:rPr lang="en-US" dirty="0"/>
-              <a:t>-demand ZOOM meetings</a:t>
+              <a:t>-demand Zoom meetings</a:t>
             </a:r>
             <a:endParaRPr lang="en-GB" dirty="0"/>
           </a:p>
